--- a/output/wordlabs-ob-prefix-3day.pptx
+++ b/output/wordlabs-ob-prefix-3day.pptx
@@ -6040,7 +6040,7 @@
                 <a:ea typeface="Calibri" pitchFamily="34" charset="-122"/>
                 <a:cs typeface="Calibri" pitchFamily="34" charset="-120"/>
               </a:rPr>
-              <a:t>The scientist had to </a:t>
+              <a:t>We had to </a:t>
             </a:r>
             <a:pPr algn="l" indent="0" marL="0">
               <a:buNone/>
@@ -6071,7 +6071,7 @@
                 <a:ea typeface="Calibri" pitchFamily="34" charset="-122"/>
                 <a:cs typeface="Calibri" pitchFamily="34" charset="-120"/>
               </a:rPr>
-              <a:t> closely to </a:t>
+              <a:t> the experiment carefully and </a:t>
             </a:r>
             <a:pPr algn="l" indent="0" marL="0">
               <a:buNone/>
@@ -6102,7 +6102,7 @@
                 <a:ea typeface="Calibri" pitchFamily="34" charset="-122"/>
                 <a:cs typeface="Calibri" pitchFamily="34" charset="-120"/>
               </a:rPr>
-              <a:t> the results she needed.</a:t>
+              <a:t> the results.</a:t>
             </a:r>
             <a:endParaRPr lang="en-US" sz="1800" dirty="0"/>
           </a:p>
@@ -7860,7 +7860,7 @@
                 <a:ea typeface="Calibri" pitchFamily="34" charset="-122"/>
                 <a:cs typeface="Calibri" pitchFamily="34" charset="-120"/>
               </a:rPr>
-              <a:t>toward, in the way</a:t>
+              <a:t>toward, against</a:t>
             </a:r>
             <a:endParaRPr lang="en-US" sz="850" dirty="0"/>
           </a:p>
@@ -7972,7 +7972,7 @@
                 <a:ea typeface="Calibri" pitchFamily="34" charset="-122"/>
                 <a:cs typeface="Calibri" pitchFamily="34" charset="-120"/>
               </a:rPr>
-              <a:t>to watch, keep</a:t>
+              <a:t>watch, keep</a:t>
             </a:r>
             <a:endParaRPr lang="en-US" sz="850" dirty="0"/>
           </a:p>
@@ -8845,7 +8845,7 @@
                 <a:ea typeface="Calibri" pitchFamily="34" charset="-122"/>
                 <a:cs typeface="Calibri" pitchFamily="34" charset="-120"/>
               </a:rPr>
-              <a:t>toward, in the way</a:t>
+              <a:t>toward, against</a:t>
             </a:r>
             <a:endParaRPr lang="en-US" sz="850" dirty="0"/>
           </a:p>
@@ -8957,7 +8957,7 @@
                 <a:ea typeface="Calibri" pitchFamily="34" charset="-122"/>
                 <a:cs typeface="Calibri" pitchFamily="34" charset="-120"/>
               </a:rPr>
-              <a:t>to watch, keep</a:t>
+              <a:t>watch, keep</a:t>
             </a:r>
             <a:endParaRPr lang="en-US" sz="850" dirty="0"/>
           </a:p>
@@ -9962,7 +9962,7 @@
                 <a:ea typeface="Calibri" pitchFamily="34" charset="-122"/>
                 <a:cs typeface="Calibri" pitchFamily="34" charset="-120"/>
               </a:rPr>
-              <a:t>toward, in the way</a:t>
+              <a:t>toward, against</a:t>
             </a:r>
             <a:endParaRPr lang="en-US" sz="850" dirty="0"/>
           </a:p>
@@ -10074,7 +10074,7 @@
                 <a:ea typeface="Calibri" pitchFamily="34" charset="-122"/>
                 <a:cs typeface="Calibri" pitchFamily="34" charset="-120"/>
               </a:rPr>
-              <a:t>to watch, keep</a:t>
+              <a:t>watch, keep</a:t>
             </a:r>
             <a:endParaRPr lang="en-US" sz="850" dirty="0"/>
           </a:p>
@@ -12309,7 +12309,7 @@
                 <a:ea typeface="Calibri" pitchFamily="34" charset="-122"/>
                 <a:cs typeface="Calibri" pitchFamily="34" charset="-120"/>
               </a:rPr>
-              <a:t>to hold</a:t>
+              <a:t>hold, keep</a:t>
             </a:r>
             <a:endParaRPr lang="en-US" sz="850" dirty="0"/>
           </a:p>
@@ -13294,7 +13294,7 @@
                 <a:ea typeface="Calibri" pitchFamily="34" charset="-122"/>
                 <a:cs typeface="Calibri" pitchFamily="34" charset="-120"/>
               </a:rPr>
-              <a:t>to hold</a:t>
+              <a:t>hold, keep</a:t>
             </a:r>
             <a:endParaRPr lang="en-US" sz="850" dirty="0"/>
           </a:p>
@@ -14676,7 +14676,7 @@
                 <a:ea typeface="Calibri" pitchFamily="34" charset="-122"/>
                 <a:cs typeface="Calibri" pitchFamily="34" charset="-120"/>
               </a:rPr>
-              <a:t>to hold</a:t>
+              <a:t>hold, keep</a:t>
             </a:r>
             <a:endParaRPr lang="en-US" sz="850" dirty="0"/>
           </a:p>
@@ -16689,7 +16689,7 @@
                 <a:ea typeface="Calibri" pitchFamily="34" charset="-122"/>
                 <a:cs typeface="Calibri" pitchFamily="34" charset="-120"/>
               </a:rPr>
-              <a:t>It was </a:t>
+              <a:t>The </a:t>
             </a:r>
             <a:pPr algn="l" indent="0" marL="0">
               <a:buNone/>
@@ -16720,7 +16720,7 @@
                 <a:ea typeface="Calibri" pitchFamily="34" charset="-122"/>
                 <a:cs typeface="Calibri" pitchFamily="34" charset="-120"/>
               </a:rPr>
-              <a:t> that the </a:t>
+              <a:t> </a:t>
             </a:r>
             <a:pPr algn="l" indent="0" marL="0">
               <a:buNone/>
@@ -16737,7 +16737,7 @@
                 <a:ea typeface="Calibri" pitchFamily="34" charset="-122"/>
                 <a:cs typeface="Calibri" pitchFamily="34" charset="-120"/>
               </a:rPr>
-              <a:t>obstacle</a:t>
+              <a:t>obstruction</a:t>
             </a:r>
             <a:pPr algn="l" indent="0" marL="0">
               <a:buNone/>
@@ -16751,7 +16751,7 @@
                 <a:ea typeface="Calibri" pitchFamily="34" charset="-122"/>
                 <a:cs typeface="Calibri" pitchFamily="34" charset="-120"/>
               </a:rPr>
-              <a:t> would </a:t>
+              <a:t> made it difficult to </a:t>
             </a:r>
             <a:pPr algn="l" indent="0" marL="0">
               <a:buNone/>
@@ -16768,7 +16768,7 @@
                 <a:ea typeface="Calibri" pitchFamily="34" charset="-122"/>
                 <a:cs typeface="Calibri" pitchFamily="34" charset="-120"/>
               </a:rPr>
-              <a:t>obstruct</a:t>
+              <a:t>object</a:t>
             </a:r>
             <a:pPr algn="l" indent="0" marL="0">
               <a:buNone/>
@@ -16782,7 +16782,7 @@
                 <a:ea typeface="Calibri" pitchFamily="34" charset="-122"/>
                 <a:cs typeface="Calibri" pitchFamily="34" charset="-120"/>
               </a:rPr>
-              <a:t> the runners on the track.</a:t>
+              <a:t> to the new plan.</a:t>
             </a:r>
             <a:endParaRPr lang="en-US" sz="1800" dirty="0"/>
           </a:p>
@@ -17065,7 +17065,7 @@
                 <a:ea typeface="Trebuchet MS" pitchFamily="34" charset="-122"/>
                 <a:cs typeface="Trebuchet MS" pitchFamily="34" charset="-120"/>
               </a:rPr>
-              <a:t>obstacle</a:t>
+              <a:t>obstruction</a:t>
             </a:r>
             <a:endParaRPr lang="en-US" sz="1400" dirty="0"/>
           </a:p>
@@ -17193,7 +17193,7 @@
                 <a:ea typeface="Trebuchet MS" pitchFamily="34" charset="-122"/>
                 <a:cs typeface="Trebuchet MS" pitchFamily="34" charset="-120"/>
               </a:rPr>
-              <a:t>obstruct</a:t>
+              <a:t>object</a:t>
             </a:r>
             <a:endParaRPr lang="en-US" sz="1400" dirty="0"/>
           </a:p>
@@ -18668,7 +18668,7 @@
                 <a:ea typeface="Calibri" pitchFamily="34" charset="-122"/>
                 <a:cs typeface="Calibri" pitchFamily="34" charset="-120"/>
               </a:rPr>
-              <a:t>toward, in the way</a:t>
+              <a:t>toward, against</a:t>
             </a:r>
             <a:endParaRPr lang="en-US" sz="850" dirty="0"/>
           </a:p>
@@ -18780,7 +18780,7 @@
                 <a:ea typeface="Calibri" pitchFamily="34" charset="-122"/>
                 <a:cs typeface="Calibri" pitchFamily="34" charset="-120"/>
               </a:rPr>
-              <a:t>way, path</a:t>
+              <a:t>way, road</a:t>
             </a:r>
             <a:endParaRPr lang="en-US" sz="850" dirty="0"/>
           </a:p>
@@ -18892,7 +18892,7 @@
                 <a:ea typeface="Calibri" pitchFamily="34" charset="-122"/>
                 <a:cs typeface="Calibri" pitchFamily="34" charset="-120"/>
               </a:rPr>
-              <a:t>full of, having</a:t>
+              <a:t>having the quality of</a:t>
             </a:r>
             <a:endParaRPr lang="en-US" sz="850" dirty="0"/>
           </a:p>
@@ -19765,7 +19765,7 @@
                 <a:ea typeface="Calibri" pitchFamily="34" charset="-122"/>
                 <a:cs typeface="Calibri" pitchFamily="34" charset="-120"/>
               </a:rPr>
-              <a:t>toward, in the way</a:t>
+              <a:t>toward, against</a:t>
             </a:r>
             <a:endParaRPr lang="en-US" sz="850" dirty="0"/>
           </a:p>
@@ -19877,7 +19877,7 @@
                 <a:ea typeface="Calibri" pitchFamily="34" charset="-122"/>
                 <a:cs typeface="Calibri" pitchFamily="34" charset="-120"/>
               </a:rPr>
-              <a:t>way, path</a:t>
+              <a:t>way, road</a:t>
             </a:r>
             <a:endParaRPr lang="en-US" sz="850" dirty="0"/>
           </a:p>
@@ -19989,7 +19989,7 @@
                 <a:ea typeface="Calibri" pitchFamily="34" charset="-122"/>
                 <a:cs typeface="Calibri" pitchFamily="34" charset="-120"/>
               </a:rPr>
-              <a:t>full of, having</a:t>
+              <a:t>having the quality of</a:t>
             </a:r>
             <a:endParaRPr lang="en-US" sz="850" dirty="0"/>
           </a:p>
@@ -21099,7 +21099,7 @@
                 <a:ea typeface="Calibri" pitchFamily="34" charset="-122"/>
                 <a:cs typeface="Calibri" pitchFamily="34" charset="-120"/>
               </a:rPr>
-              <a:t>toward, in the way</a:t>
+              <a:t>toward, against</a:t>
             </a:r>
             <a:endParaRPr lang="en-US" sz="850" dirty="0"/>
           </a:p>
@@ -21211,7 +21211,7 @@
                 <a:ea typeface="Calibri" pitchFamily="34" charset="-122"/>
                 <a:cs typeface="Calibri" pitchFamily="34" charset="-120"/>
               </a:rPr>
-              <a:t>way, path</a:t>
+              <a:t>way, road</a:t>
             </a:r>
             <a:endParaRPr lang="en-US" sz="850" dirty="0"/>
           </a:p>
@@ -21323,7 +21323,7 @@
                 <a:ea typeface="Calibri" pitchFamily="34" charset="-122"/>
                 <a:cs typeface="Calibri" pitchFamily="34" charset="-120"/>
               </a:rPr>
-              <a:t>full of, having</a:t>
+              <a:t>having the quality of</a:t>
             </a:r>
             <a:endParaRPr lang="en-US" sz="850" dirty="0"/>
           </a:p>
@@ -22612,7 +22612,7 @@
                 <a:ea typeface="Trebuchet MS" pitchFamily="34" charset="-122"/>
                 <a:cs typeface="Trebuchet MS" pitchFamily="34" charset="-120"/>
               </a:rPr>
-              <a:t>obstacle</a:t>
+              <a:t>obstruction</a:t>
             </a:r>
             <a:endParaRPr lang="en-US" sz="2800" dirty="0"/>
           </a:p>
@@ -23439,7 +23439,7 @@
                 <a:ea typeface="Trebuchet MS" pitchFamily="34" charset="-122"/>
                 <a:cs typeface="Trebuchet MS" pitchFamily="34" charset="-120"/>
               </a:rPr>
-              <a:t>obstacle</a:t>
+              <a:t>obstruction</a:t>
             </a:r>
             <a:endParaRPr lang="en-US" sz="2800" dirty="0"/>
           </a:p>
@@ -23690,7 +23690,7 @@
                 <a:ea typeface="Trebuchet MS" pitchFamily="34" charset="-122"/>
                 <a:cs typeface="Trebuchet MS" pitchFamily="34" charset="-120"/>
               </a:rPr>
-              <a:t>stac</a:t>
+              <a:t>struct</a:t>
             </a:r>
             <a:endParaRPr lang="en-US" sz="1300" dirty="0"/>
           </a:p>
@@ -23729,7 +23729,7 @@
                 <a:ea typeface="Calibri" pitchFamily="34" charset="-122"/>
                 <a:cs typeface="Calibri" pitchFamily="34" charset="-120"/>
               </a:rPr>
-              <a:t>to stand</a:t>
+              <a:t>build, pile up</a:t>
             </a:r>
             <a:endParaRPr lang="en-US" sz="850" dirty="0"/>
           </a:p>
@@ -23802,7 +23802,7 @@
                 <a:ea typeface="Trebuchet MS" pitchFamily="34" charset="-122"/>
                 <a:cs typeface="Trebuchet MS" pitchFamily="34" charset="-120"/>
               </a:rPr>
-              <a:t>le</a:t>
+              <a:t>ion</a:t>
             </a:r>
             <a:endParaRPr lang="en-US" sz="1300" dirty="0"/>
           </a:p>
@@ -23841,7 +23841,7 @@
                 <a:ea typeface="Calibri" pitchFamily="34" charset="-122"/>
                 <a:cs typeface="Calibri" pitchFamily="34" charset="-120"/>
               </a:rPr>
-              <a:t>noun-forming suffix</a:t>
+              <a:t>act or result of</a:t>
             </a:r>
             <a:endParaRPr lang="en-US" sz="850" dirty="0"/>
           </a:p>
@@ -25255,7 +25255,7 @@
                 <a:ea typeface="Trebuchet MS" pitchFamily="34" charset="-122"/>
                 <a:cs typeface="Trebuchet MS" pitchFamily="34" charset="-120"/>
               </a:rPr>
-              <a:t>obstacle</a:t>
+              <a:t>obstruction</a:t>
             </a:r>
             <a:endParaRPr lang="en-US" sz="2800" dirty="0"/>
           </a:p>
@@ -25506,7 +25506,7 @@
                 <a:ea typeface="Trebuchet MS" pitchFamily="34" charset="-122"/>
                 <a:cs typeface="Trebuchet MS" pitchFamily="34" charset="-120"/>
               </a:rPr>
-              <a:t>stac</a:t>
+              <a:t>struct</a:t>
             </a:r>
             <a:endParaRPr lang="en-US" sz="1300" dirty="0"/>
           </a:p>
@@ -25545,7 +25545,7 @@
                 <a:ea typeface="Calibri" pitchFamily="34" charset="-122"/>
                 <a:cs typeface="Calibri" pitchFamily="34" charset="-120"/>
               </a:rPr>
-              <a:t>to stand</a:t>
+              <a:t>build, pile up</a:t>
             </a:r>
             <a:endParaRPr lang="en-US" sz="850" dirty="0"/>
           </a:p>
@@ -25618,7 +25618,7 @@
                 <a:ea typeface="Trebuchet MS" pitchFamily="34" charset="-122"/>
                 <a:cs typeface="Trebuchet MS" pitchFamily="34" charset="-120"/>
               </a:rPr>
-              <a:t>le</a:t>
+              <a:t>ion</a:t>
             </a:r>
             <a:endParaRPr lang="en-US" sz="1300" dirty="0"/>
           </a:p>
@@ -25657,7 +25657,7 @@
                 <a:ea typeface="Calibri" pitchFamily="34" charset="-122"/>
                 <a:cs typeface="Calibri" pitchFamily="34" charset="-120"/>
               </a:rPr>
-              <a:t>noun-forming suffix</a:t>
+              <a:t>act or result of</a:t>
             </a:r>
             <a:endParaRPr lang="en-US" sz="850" dirty="0"/>
           </a:p>
@@ -25921,7 +25921,7 @@
                 <a:ea typeface="Trebuchet MS" pitchFamily="34" charset="-122"/>
                 <a:cs typeface="Trebuchet MS" pitchFamily="34" charset="-120"/>
               </a:rPr>
-              <a:t>sta</a:t>
+              <a:t>struc</a:t>
             </a:r>
             <a:endParaRPr lang="en-US" sz="1400" dirty="0"/>
           </a:p>
@@ -26026,7 +26026,7 @@
                 <a:ea typeface="Trebuchet MS" pitchFamily="34" charset="-122"/>
                 <a:cs typeface="Trebuchet MS" pitchFamily="34" charset="-120"/>
               </a:rPr>
-              <a:t>cle</a:t>
+              <a:t>tion</a:t>
             </a:r>
             <a:endParaRPr lang="en-US" sz="1400" dirty="0"/>
           </a:p>
@@ -26589,7 +26589,7 @@
                 <a:ea typeface="Trebuchet MS" pitchFamily="34" charset="-122"/>
                 <a:cs typeface="Trebuchet MS" pitchFamily="34" charset="-120"/>
               </a:rPr>
-              <a:t>obstacle</a:t>
+              <a:t>obstruction</a:t>
             </a:r>
             <a:endParaRPr lang="en-US" sz="2800" dirty="0"/>
           </a:p>
@@ -26840,7 +26840,7 @@
                 <a:ea typeface="Trebuchet MS" pitchFamily="34" charset="-122"/>
                 <a:cs typeface="Trebuchet MS" pitchFamily="34" charset="-120"/>
               </a:rPr>
-              <a:t>stac</a:t>
+              <a:t>struct</a:t>
             </a:r>
             <a:endParaRPr lang="en-US" sz="1300" dirty="0"/>
           </a:p>
@@ -26879,7 +26879,7 @@
                 <a:ea typeface="Calibri" pitchFamily="34" charset="-122"/>
                 <a:cs typeface="Calibri" pitchFamily="34" charset="-120"/>
               </a:rPr>
-              <a:t>to stand</a:t>
+              <a:t>build, pile up</a:t>
             </a:r>
             <a:endParaRPr lang="en-US" sz="850" dirty="0"/>
           </a:p>
@@ -26952,7 +26952,7 @@
                 <a:ea typeface="Trebuchet MS" pitchFamily="34" charset="-122"/>
                 <a:cs typeface="Trebuchet MS" pitchFamily="34" charset="-120"/>
               </a:rPr>
-              <a:t>le</a:t>
+              <a:t>ion</a:t>
             </a:r>
             <a:endParaRPr lang="en-US" sz="1300" dirty="0"/>
           </a:p>
@@ -26991,7 +26991,7 @@
                 <a:ea typeface="Calibri" pitchFamily="34" charset="-122"/>
                 <a:cs typeface="Calibri" pitchFamily="34" charset="-120"/>
               </a:rPr>
-              <a:t>noun-forming suffix</a:t>
+              <a:t>act or result of</a:t>
             </a:r>
             <a:endParaRPr lang="en-US" sz="850" dirty="0"/>
           </a:p>
@@ -27255,7 +27255,7 @@
                 <a:ea typeface="Trebuchet MS" pitchFamily="34" charset="-122"/>
                 <a:cs typeface="Trebuchet MS" pitchFamily="34" charset="-120"/>
               </a:rPr>
-              <a:t>sta</a:t>
+              <a:t>struc</a:t>
             </a:r>
             <a:endParaRPr lang="en-US" sz="1400" dirty="0"/>
           </a:p>
@@ -27360,7 +27360,7 @@
                 <a:ea typeface="Trebuchet MS" pitchFamily="34" charset="-122"/>
                 <a:cs typeface="Trebuchet MS" pitchFamily="34" charset="-120"/>
               </a:rPr>
-              <a:t>cle</a:t>
+              <a:t>tion</a:t>
             </a:r>
             <a:endParaRPr lang="en-US" sz="1400" dirty="0"/>
           </a:p>
@@ -27467,8 +27467,8 @@
         </p:nvSpPr>
         <p:spPr>
           <a:xfrm>
-            <a:off x="2124837" y="4169664"/>
-            <a:ext cx="685800" cy="384048"/>
+            <a:off x="1951330" y="4169664"/>
+            <a:ext cx="676656" cy="384048"/>
           </a:xfrm>
           <a:prstGeom prst="rect">
             <a:avLst>
@@ -27494,8 +27494,8 @@
         </p:nvSpPr>
         <p:spPr>
           <a:xfrm>
-            <a:off x="2124837" y="4169664"/>
-            <a:ext cx="685800" cy="384048"/>
+            <a:off x="1951330" y="4169664"/>
+            <a:ext cx="676656" cy="384048"/>
           </a:xfrm>
           <a:prstGeom prst="rect">
             <a:avLst/>
@@ -27533,8 +27533,8 @@
         </p:nvSpPr>
         <p:spPr>
           <a:xfrm>
-            <a:off x="3033522" y="4169664"/>
-            <a:ext cx="685800" cy="384048"/>
+            <a:off x="2677363" y="4169664"/>
+            <a:ext cx="676656" cy="384048"/>
           </a:xfrm>
           <a:prstGeom prst="rect">
             <a:avLst>
@@ -27560,8 +27560,8 @@
         </p:nvSpPr>
         <p:spPr>
           <a:xfrm>
-            <a:off x="3033522" y="4169664"/>
-            <a:ext cx="685800" cy="384048"/>
+            <a:off x="2677363" y="4169664"/>
+            <a:ext cx="676656" cy="384048"/>
           </a:xfrm>
           <a:prstGeom prst="rect">
             <a:avLst/>
@@ -27599,8 +27599,8 @@
         </p:nvSpPr>
         <p:spPr>
           <a:xfrm>
-            <a:off x="3942207" y="4169664"/>
-            <a:ext cx="685800" cy="384048"/>
+            <a:off x="3403397" y="4169664"/>
+            <a:ext cx="676656" cy="384048"/>
           </a:xfrm>
           <a:prstGeom prst="rect">
             <a:avLst>
@@ -27626,8 +27626,8 @@
         </p:nvSpPr>
         <p:spPr>
           <a:xfrm>
-            <a:off x="3942207" y="4169664"/>
-            <a:ext cx="685800" cy="384048"/>
+            <a:off x="3403397" y="4169664"/>
+            <a:ext cx="676656" cy="384048"/>
           </a:xfrm>
           <a:prstGeom prst="rect">
             <a:avLst/>
@@ -27665,8 +27665,8 @@
         </p:nvSpPr>
         <p:spPr>
           <a:xfrm>
-            <a:off x="4850892" y="4169664"/>
-            <a:ext cx="685800" cy="384048"/>
+            <a:off x="4129430" y="4169664"/>
+            <a:ext cx="676656" cy="384048"/>
           </a:xfrm>
           <a:prstGeom prst="rect">
             <a:avLst>
@@ -27692,8 +27692,8 @@
         </p:nvSpPr>
         <p:spPr>
           <a:xfrm>
-            <a:off x="4850892" y="4169664"/>
-            <a:ext cx="685800" cy="384048"/>
+            <a:off x="4129430" y="4169664"/>
+            <a:ext cx="676656" cy="384048"/>
           </a:xfrm>
           <a:prstGeom prst="rect">
             <a:avLst/>
@@ -27731,8 +27731,8 @@
         </p:nvSpPr>
         <p:spPr>
           <a:xfrm>
-            <a:off x="5759577" y="4169664"/>
-            <a:ext cx="685800" cy="384048"/>
+            <a:off x="4855464" y="4169664"/>
+            <a:ext cx="676656" cy="384048"/>
           </a:xfrm>
           <a:prstGeom prst="rect">
             <a:avLst>
@@ -27758,8 +27758,8 @@
         </p:nvSpPr>
         <p:spPr>
           <a:xfrm>
-            <a:off x="5759577" y="4169664"/>
-            <a:ext cx="685800" cy="384048"/>
+            <a:off x="4855464" y="4169664"/>
+            <a:ext cx="676656" cy="384048"/>
           </a:xfrm>
           <a:prstGeom prst="rect">
             <a:avLst/>
@@ -27783,7 +27783,7 @@
                 <a:ea typeface="Trebuchet MS" pitchFamily="34" charset="-122"/>
                 <a:cs typeface="Trebuchet MS" pitchFamily="34" charset="-120"/>
               </a:rPr>
-              <a:t>a</a:t>
+              <a:t>r</a:t>
             </a:r>
             <a:endParaRPr lang="en-US" sz="900" dirty="0"/>
           </a:p>
@@ -27797,8 +27797,8 @@
         </p:nvSpPr>
         <p:spPr>
           <a:xfrm>
-            <a:off x="6668262" y="4169664"/>
-            <a:ext cx="685800" cy="384048"/>
+            <a:off x="5581498" y="4169664"/>
+            <a:ext cx="676656" cy="384048"/>
           </a:xfrm>
           <a:prstGeom prst="rect">
             <a:avLst>
@@ -27824,8 +27824,8 @@
         </p:nvSpPr>
         <p:spPr>
           <a:xfrm>
-            <a:off x="6668262" y="4169664"/>
-            <a:ext cx="685800" cy="384048"/>
+            <a:off x="5581498" y="4169664"/>
+            <a:ext cx="676656" cy="384048"/>
           </a:xfrm>
           <a:prstGeom prst="rect">
             <a:avLst/>
@@ -27849,6 +27849,72 @@
                 <a:ea typeface="Trebuchet MS" pitchFamily="34" charset="-122"/>
                 <a:cs typeface="Trebuchet MS" pitchFamily="34" charset="-120"/>
               </a:rPr>
+              <a:t>u</a:t>
+            </a:r>
+            <a:endParaRPr lang="en-US" sz="900" dirty="0"/>
+          </a:p>
+        </p:txBody>
+      </p:sp>
+      <p:sp>
+        <p:nvSpPr>
+          <p:cNvPr id="51" name="Shape 49"/>
+          <p:cNvSpPr/>
+          <p:nvPr/>
+        </p:nvSpPr>
+        <p:spPr>
+          <a:xfrm>
+            <a:off x="6307531" y="4169664"/>
+            <a:ext cx="676656" cy="384048"/>
+          </a:xfrm>
+          <a:prstGeom prst="rect">
+            <a:avLst>
+              <a:gd name="adj" fmla="val 9524"/>
+            </a:avLst>
+          </a:prstGeom>
+          <a:solidFill>
+            <a:srgbClr val="FFFFFF"/>
+          </a:solidFill>
+          <a:ln w="12700">
+            <a:solidFill>
+              <a:srgbClr val="DB2777"/>
+            </a:solidFill>
+            <a:prstDash val="solid"/>
+          </a:ln>
+        </p:spPr>
+      </p:sp>
+      <p:sp>
+        <p:nvSpPr>
+          <p:cNvPr id="52" name="Text 50"/>
+          <p:cNvSpPr/>
+          <p:nvPr/>
+        </p:nvSpPr>
+        <p:spPr>
+          <a:xfrm>
+            <a:off x="6307531" y="4169664"/>
+            <a:ext cx="676656" cy="384048"/>
+          </a:xfrm>
+          <a:prstGeom prst="rect">
+            <a:avLst/>
+          </a:prstGeom>
+          <a:noFill/>
+          <a:ln/>
+        </p:spPr>
+        <p:txBody>
+          <a:bodyPr wrap="square" lIns="0" tIns="0" rIns="0" bIns="0" rtlCol="0" anchor="ctr"/>
+          <a:lstStyle/>
+          <a:p>
+            <a:pPr algn="ctr" indent="0" marL="0">
+              <a:buNone/>
+            </a:pPr>
+            <a:r>
+              <a:rPr lang="en-US" sz="900" b="1" dirty="0">
+                <a:solidFill>
+                  <a:srgbClr val="9D174D"/>
+                </a:solidFill>
+                <a:latin typeface="Trebuchet MS" pitchFamily="34" charset="0"/>
+                <a:ea typeface="Trebuchet MS" pitchFamily="34" charset="-122"/>
+                <a:cs typeface="Trebuchet MS" pitchFamily="34" charset="-120"/>
+              </a:rPr>
               <a:t>c</a:t>
             </a:r>
             <a:endParaRPr lang="en-US" sz="900" dirty="0"/>
@@ -27857,14 +27923,146 @@
       </p:sp>
       <p:sp>
         <p:nvSpPr>
-          <p:cNvPr id="51" name="Text 49"/>
-          <p:cNvSpPr/>
-          <p:nvPr/>
-        </p:nvSpPr>
-        <p:spPr>
-          <a:xfrm>
-            <a:off x="6668262" y="4572000"/>
-            <a:ext cx="685800" cy="219456"/>
+          <p:cNvPr id="53" name="Shape 51"/>
+          <p:cNvSpPr/>
+          <p:nvPr/>
+        </p:nvSpPr>
+        <p:spPr>
+          <a:xfrm>
+            <a:off x="7033565" y="4169664"/>
+            <a:ext cx="676656" cy="384048"/>
+          </a:xfrm>
+          <a:prstGeom prst="rect">
+            <a:avLst>
+              <a:gd name="adj" fmla="val 9524"/>
+            </a:avLst>
+          </a:prstGeom>
+          <a:solidFill>
+            <a:srgbClr val="FFFFFF"/>
+          </a:solidFill>
+          <a:ln w="12700">
+            <a:solidFill>
+              <a:srgbClr val="DB2777"/>
+            </a:solidFill>
+            <a:prstDash val="solid"/>
+          </a:ln>
+        </p:spPr>
+      </p:sp>
+      <p:sp>
+        <p:nvSpPr>
+          <p:cNvPr id="54" name="Text 52"/>
+          <p:cNvSpPr/>
+          <p:nvPr/>
+        </p:nvSpPr>
+        <p:spPr>
+          <a:xfrm>
+            <a:off x="7033565" y="4169664"/>
+            <a:ext cx="676656" cy="384048"/>
+          </a:xfrm>
+          <a:prstGeom prst="rect">
+            <a:avLst/>
+          </a:prstGeom>
+          <a:noFill/>
+          <a:ln/>
+        </p:spPr>
+        <p:txBody>
+          <a:bodyPr wrap="square" lIns="0" tIns="0" rIns="0" bIns="0" rtlCol="0" anchor="ctr"/>
+          <a:lstStyle/>
+          <a:p>
+            <a:pPr algn="ctr" indent="0" marL="0">
+              <a:buNone/>
+            </a:pPr>
+            <a:r>
+              <a:rPr lang="en-US" sz="900" b="1" dirty="0">
+                <a:solidFill>
+                  <a:srgbClr val="9D174D"/>
+                </a:solidFill>
+                <a:latin typeface="Trebuchet MS" pitchFamily="34" charset="0"/>
+                <a:ea typeface="Trebuchet MS" pitchFamily="34" charset="-122"/>
+                <a:cs typeface="Trebuchet MS" pitchFamily="34" charset="-120"/>
+              </a:rPr>
+              <a:t>t</a:t>
+            </a:r>
+            <a:endParaRPr lang="en-US" sz="900" dirty="0"/>
+          </a:p>
+        </p:txBody>
+      </p:sp>
+      <p:sp>
+        <p:nvSpPr>
+          <p:cNvPr id="55" name="Shape 53"/>
+          <p:cNvSpPr/>
+          <p:nvPr/>
+        </p:nvSpPr>
+        <p:spPr>
+          <a:xfrm>
+            <a:off x="7759598" y="4169664"/>
+            <a:ext cx="676656" cy="384048"/>
+          </a:xfrm>
+          <a:prstGeom prst="rect">
+            <a:avLst>
+              <a:gd name="adj" fmla="val 9524"/>
+            </a:avLst>
+          </a:prstGeom>
+          <a:solidFill>
+            <a:srgbClr val="FFFFFF"/>
+          </a:solidFill>
+          <a:ln w="12700">
+            <a:solidFill>
+              <a:srgbClr val="DB2777"/>
+            </a:solidFill>
+            <a:prstDash val="solid"/>
+          </a:ln>
+        </p:spPr>
+      </p:sp>
+      <p:sp>
+        <p:nvSpPr>
+          <p:cNvPr id="56" name="Text 54"/>
+          <p:cNvSpPr/>
+          <p:nvPr/>
+        </p:nvSpPr>
+        <p:spPr>
+          <a:xfrm>
+            <a:off x="7759598" y="4169664"/>
+            <a:ext cx="676656" cy="384048"/>
+          </a:xfrm>
+          <a:prstGeom prst="rect">
+            <a:avLst/>
+          </a:prstGeom>
+          <a:noFill/>
+          <a:ln/>
+        </p:spPr>
+        <p:txBody>
+          <a:bodyPr wrap="square" lIns="0" tIns="0" rIns="0" bIns="0" rtlCol="0" anchor="ctr"/>
+          <a:lstStyle/>
+          <a:p>
+            <a:pPr algn="ctr" indent="0" marL="0">
+              <a:buNone/>
+            </a:pPr>
+            <a:r>
+              <a:rPr lang="en-US" sz="900" b="1" dirty="0">
+                <a:solidFill>
+                  <a:srgbClr val="9D174D"/>
+                </a:solidFill>
+                <a:latin typeface="Trebuchet MS" pitchFamily="34" charset="0"/>
+                <a:ea typeface="Trebuchet MS" pitchFamily="34" charset="-122"/>
+                <a:cs typeface="Trebuchet MS" pitchFamily="34" charset="-120"/>
+              </a:rPr>
+              <a:t>ion</a:t>
+            </a:r>
+            <a:endParaRPr lang="en-US" sz="900" dirty="0"/>
+          </a:p>
+        </p:txBody>
+      </p:sp>
+      <p:sp>
+        <p:nvSpPr>
+          <p:cNvPr id="57" name="Text 55"/>
+          <p:cNvSpPr/>
+          <p:nvPr/>
+        </p:nvSpPr>
+        <p:spPr>
+          <a:xfrm>
+            <a:off x="7759598" y="4572000"/>
+            <a:ext cx="676656" cy="219456"/>
           </a:xfrm>
           <a:prstGeom prst="rect">
             <a:avLst/>
@@ -27888,75 +28086,9 @@
                 <a:ea typeface="Calibri" pitchFamily="34" charset="-122"/>
                 <a:cs typeface="Calibri" pitchFamily="34" charset="-120"/>
               </a:rPr>
-              <a:t>/k/</a:t>
+              <a:t>/shun/</a:t>
             </a:r>
             <a:endParaRPr lang="en-US" sz="750" dirty="0"/>
-          </a:p>
-        </p:txBody>
-      </p:sp>
-      <p:sp>
-        <p:nvSpPr>
-          <p:cNvPr id="52" name="Shape 50"/>
-          <p:cNvSpPr/>
-          <p:nvPr/>
-        </p:nvSpPr>
-        <p:spPr>
-          <a:xfrm>
-            <a:off x="7576947" y="4169664"/>
-            <a:ext cx="685800" cy="384048"/>
-          </a:xfrm>
-          <a:prstGeom prst="rect">
-            <a:avLst>
-              <a:gd name="adj" fmla="val 9524"/>
-            </a:avLst>
-          </a:prstGeom>
-          <a:solidFill>
-            <a:srgbClr val="FFFFFF"/>
-          </a:solidFill>
-          <a:ln w="12700">
-            <a:solidFill>
-              <a:srgbClr val="DB2777"/>
-            </a:solidFill>
-            <a:prstDash val="solid"/>
-          </a:ln>
-        </p:spPr>
-      </p:sp>
-      <p:sp>
-        <p:nvSpPr>
-          <p:cNvPr id="53" name="Text 51"/>
-          <p:cNvSpPr/>
-          <p:nvPr/>
-        </p:nvSpPr>
-        <p:spPr>
-          <a:xfrm>
-            <a:off x="7576947" y="4169664"/>
-            <a:ext cx="685800" cy="384048"/>
-          </a:xfrm>
-          <a:prstGeom prst="rect">
-            <a:avLst/>
-          </a:prstGeom>
-          <a:noFill/>
-          <a:ln/>
-        </p:spPr>
-        <p:txBody>
-          <a:bodyPr wrap="square" lIns="0" tIns="0" rIns="0" bIns="0" rtlCol="0" anchor="ctr"/>
-          <a:lstStyle/>
-          <a:p>
-            <a:pPr algn="ctr" indent="0" marL="0">
-              <a:buNone/>
-            </a:pPr>
-            <a:r>
-              <a:rPr lang="en-US" sz="900" b="1" dirty="0">
-                <a:solidFill>
-                  <a:srgbClr val="9D174D"/>
-                </a:solidFill>
-                <a:latin typeface="Trebuchet MS" pitchFamily="34" charset="0"/>
-                <a:ea typeface="Trebuchet MS" pitchFamily="34" charset="-122"/>
-                <a:cs typeface="Trebuchet MS" pitchFamily="34" charset="-120"/>
-              </a:rPr>
-              <a:t>le</a:t>
-            </a:r>
-            <a:endParaRPr lang="en-US" sz="900" dirty="0"/>
           </a:p>
         </p:txBody>
       </p:sp>
@@ -28385,7 +28517,7 @@
                 <a:ea typeface="Trebuchet MS" pitchFamily="34" charset="-122"/>
                 <a:cs typeface="Trebuchet MS" pitchFamily="34" charset="-120"/>
               </a:rPr>
-              <a:t>obstruct</a:t>
+              <a:t>object</a:t>
             </a:r>
             <a:endParaRPr lang="en-US" sz="2800" dirty="0"/>
           </a:p>
@@ -29212,7 +29344,7 @@
                 <a:ea typeface="Trebuchet MS" pitchFamily="34" charset="-122"/>
                 <a:cs typeface="Trebuchet MS" pitchFamily="34" charset="-120"/>
               </a:rPr>
-              <a:t>obstruct</a:t>
+              <a:t>object</a:t>
             </a:r>
             <a:endParaRPr lang="en-US" sz="2800" dirty="0"/>
           </a:p>
@@ -29390,7 +29522,7 @@
                 <a:ea typeface="Calibri" pitchFamily="34" charset="-122"/>
                 <a:cs typeface="Calibri" pitchFamily="34" charset="-120"/>
               </a:rPr>
-              <a:t>against, in the way</a:t>
+              <a:t>against, toward</a:t>
             </a:r>
             <a:endParaRPr lang="en-US" sz="850" dirty="0"/>
           </a:p>
@@ -29463,7 +29595,7 @@
                 <a:ea typeface="Trebuchet MS" pitchFamily="34" charset="-122"/>
                 <a:cs typeface="Trebuchet MS" pitchFamily="34" charset="-120"/>
               </a:rPr>
-              <a:t>struct</a:t>
+              <a:t>ject</a:t>
             </a:r>
             <a:endParaRPr lang="en-US" sz="1300" dirty="0"/>
           </a:p>
@@ -29502,7 +29634,7 @@
                 <a:ea typeface="Calibri" pitchFamily="34" charset="-122"/>
                 <a:cs typeface="Calibri" pitchFamily="34" charset="-120"/>
               </a:rPr>
-              <a:t>to build, pile up</a:t>
+              <a:t>throw</a:t>
             </a:r>
             <a:endParaRPr lang="en-US" sz="850" dirty="0"/>
           </a:p>
@@ -30197,7 +30329,7 @@
                 <a:ea typeface="Trebuchet MS" pitchFamily="34" charset="-122"/>
                 <a:cs typeface="Trebuchet MS" pitchFamily="34" charset="-120"/>
               </a:rPr>
-              <a:t>obstruct</a:t>
+              <a:t>object</a:t>
             </a:r>
             <a:endParaRPr lang="en-US" sz="2800" dirty="0"/>
           </a:p>
@@ -30375,7 +30507,7 @@
                 <a:ea typeface="Calibri" pitchFamily="34" charset="-122"/>
                 <a:cs typeface="Calibri" pitchFamily="34" charset="-120"/>
               </a:rPr>
-              <a:t>against, in the way</a:t>
+              <a:t>against, toward</a:t>
             </a:r>
             <a:endParaRPr lang="en-US" sz="850" dirty="0"/>
           </a:p>
@@ -30448,7 +30580,7 @@
                 <a:ea typeface="Trebuchet MS" pitchFamily="34" charset="-122"/>
                 <a:cs typeface="Trebuchet MS" pitchFamily="34" charset="-120"/>
               </a:rPr>
-              <a:t>struct</a:t>
+              <a:t>ject</a:t>
             </a:r>
             <a:endParaRPr lang="en-US" sz="1300" dirty="0"/>
           </a:p>
@@ -30487,7 +30619,7 @@
                 <a:ea typeface="Calibri" pitchFamily="34" charset="-122"/>
                 <a:cs typeface="Calibri" pitchFamily="34" charset="-120"/>
               </a:rPr>
-              <a:t>to build, pile up</a:t>
+              <a:t>throw</a:t>
             </a:r>
             <a:endParaRPr lang="en-US" sz="850" dirty="0"/>
           </a:p>
@@ -30751,7 +30883,7 @@
                 <a:ea typeface="Trebuchet MS" pitchFamily="34" charset="-122"/>
                 <a:cs typeface="Trebuchet MS" pitchFamily="34" charset="-120"/>
               </a:rPr>
-              <a:t>struct</a:t>
+              <a:t>ject</a:t>
             </a:r>
             <a:endParaRPr lang="en-US" sz="1400" dirty="0"/>
           </a:p>
@@ -31314,7 +31446,7 @@
                 <a:ea typeface="Trebuchet MS" pitchFamily="34" charset="-122"/>
                 <a:cs typeface="Trebuchet MS" pitchFamily="34" charset="-120"/>
               </a:rPr>
-              <a:t>obstruct</a:t>
+              <a:t>object</a:t>
             </a:r>
             <a:endParaRPr lang="en-US" sz="2800" dirty="0"/>
           </a:p>
@@ -31492,7 +31624,7 @@
                 <a:ea typeface="Calibri" pitchFamily="34" charset="-122"/>
                 <a:cs typeface="Calibri" pitchFamily="34" charset="-120"/>
               </a:rPr>
-              <a:t>against, in the way</a:t>
+              <a:t>against, toward</a:t>
             </a:r>
             <a:endParaRPr lang="en-US" sz="850" dirty="0"/>
           </a:p>
@@ -31565,7 +31697,7 @@
                 <a:ea typeface="Trebuchet MS" pitchFamily="34" charset="-122"/>
                 <a:cs typeface="Trebuchet MS" pitchFamily="34" charset="-120"/>
               </a:rPr>
-              <a:t>struct</a:t>
+              <a:t>ject</a:t>
             </a:r>
             <a:endParaRPr lang="en-US" sz="1300" dirty="0"/>
           </a:p>
@@ -31604,7 +31736,7 @@
                 <a:ea typeface="Calibri" pitchFamily="34" charset="-122"/>
                 <a:cs typeface="Calibri" pitchFamily="34" charset="-120"/>
               </a:rPr>
-              <a:t>to build, pile up</a:t>
+              <a:t>throw</a:t>
             </a:r>
             <a:endParaRPr lang="en-US" sz="850" dirty="0"/>
           </a:p>
@@ -31868,7 +32000,7 @@
                 <a:ea typeface="Trebuchet MS" pitchFamily="34" charset="-122"/>
                 <a:cs typeface="Trebuchet MS" pitchFamily="34" charset="-120"/>
               </a:rPr>
-              <a:t>struct</a:t>
+              <a:t>ject</a:t>
             </a:r>
             <a:endParaRPr lang="en-US" sz="1400" dirty="0"/>
           </a:p>
@@ -31949,11 +32081,11 @@
         <p:spPr>
           <a:xfrm>
             <a:off x="1874520" y="4096512"/>
-            <a:ext cx="6903720" cy="804672"/>
+            <a:ext cx="6903720" cy="658368"/>
           </a:xfrm>
           <a:prstGeom prst="rect">
             <a:avLst>
-              <a:gd name="adj" fmla="val 6818"/>
+              <a:gd name="adj" fmla="val 8333"/>
             </a:avLst>
           </a:prstGeom>
           <a:solidFill>
@@ -31975,12 +32107,12 @@
         </p:nvSpPr>
         <p:spPr>
           <a:xfrm>
-            <a:off x="2124837" y="4169664"/>
-            <a:ext cx="685800" cy="384048"/>
+            <a:off x="2254649" y="4169664"/>
+            <a:ext cx="685800" cy="475488"/>
           </a:xfrm>
           <a:prstGeom prst="rect">
             <a:avLst>
-              <a:gd name="adj" fmla="val 9524"/>
+              <a:gd name="adj" fmla="val 7692"/>
             </a:avLst>
           </a:prstGeom>
           <a:solidFill>
@@ -32002,8 +32134,8 @@
         </p:nvSpPr>
         <p:spPr>
           <a:xfrm>
-            <a:off x="2124837" y="4169664"/>
-            <a:ext cx="685800" cy="384048"/>
+            <a:off x="2254649" y="4169664"/>
+            <a:ext cx="685800" cy="475488"/>
           </a:xfrm>
           <a:prstGeom prst="rect">
             <a:avLst/>
@@ -32041,12 +32173,12 @@
         </p:nvSpPr>
         <p:spPr>
           <a:xfrm>
-            <a:off x="3033522" y="4169664"/>
-            <a:ext cx="685800" cy="384048"/>
+            <a:off x="3293146" y="4169664"/>
+            <a:ext cx="685800" cy="475488"/>
           </a:xfrm>
           <a:prstGeom prst="rect">
             <a:avLst>
-              <a:gd name="adj" fmla="val 9524"/>
+              <a:gd name="adj" fmla="val 7692"/>
             </a:avLst>
           </a:prstGeom>
           <a:solidFill>
@@ -32068,8 +32200,8 @@
         </p:nvSpPr>
         <p:spPr>
           <a:xfrm>
-            <a:off x="3033522" y="4169664"/>
-            <a:ext cx="685800" cy="384048"/>
+            <a:off x="3293146" y="4169664"/>
+            <a:ext cx="685800" cy="475488"/>
           </a:xfrm>
           <a:prstGeom prst="rect">
             <a:avLst/>
@@ -32107,12 +32239,12 @@
         </p:nvSpPr>
         <p:spPr>
           <a:xfrm>
-            <a:off x="3942207" y="4169664"/>
-            <a:ext cx="685800" cy="384048"/>
+            <a:off x="4331643" y="4169664"/>
+            <a:ext cx="685800" cy="475488"/>
           </a:xfrm>
           <a:prstGeom prst="rect">
             <a:avLst>
-              <a:gd name="adj" fmla="val 9524"/>
+              <a:gd name="adj" fmla="val 7692"/>
             </a:avLst>
           </a:prstGeom>
           <a:solidFill>
@@ -32134,8 +32266,8 @@
         </p:nvSpPr>
         <p:spPr>
           <a:xfrm>
-            <a:off x="3942207" y="4169664"/>
-            <a:ext cx="685800" cy="384048"/>
+            <a:off x="4331643" y="4169664"/>
+            <a:ext cx="685800" cy="475488"/>
           </a:xfrm>
           <a:prstGeom prst="rect">
             <a:avLst/>
@@ -32159,7 +32291,7 @@
                 <a:ea typeface="Trebuchet MS" pitchFamily="34" charset="-122"/>
                 <a:cs typeface="Trebuchet MS" pitchFamily="34" charset="-120"/>
               </a:rPr>
-              <a:t>s</a:t>
+              <a:t>j</a:t>
             </a:r>
             <a:endParaRPr lang="en-US" sz="900" dirty="0"/>
           </a:p>
@@ -32173,12 +32305,12 @@
         </p:nvSpPr>
         <p:spPr>
           <a:xfrm>
-            <a:off x="4850892" y="4169664"/>
-            <a:ext cx="685800" cy="384048"/>
+            <a:off x="5370141" y="4169664"/>
+            <a:ext cx="685800" cy="475488"/>
           </a:xfrm>
           <a:prstGeom prst="rect">
             <a:avLst>
-              <a:gd name="adj" fmla="val 9524"/>
+              <a:gd name="adj" fmla="val 7692"/>
             </a:avLst>
           </a:prstGeom>
           <a:solidFill>
@@ -32200,8 +32332,8 @@
         </p:nvSpPr>
         <p:spPr>
           <a:xfrm>
-            <a:off x="4850892" y="4169664"/>
-            <a:ext cx="685800" cy="384048"/>
+            <a:off x="5370141" y="4169664"/>
+            <a:ext cx="685800" cy="475488"/>
           </a:xfrm>
           <a:prstGeom prst="rect">
             <a:avLst/>
@@ -32225,7 +32357,7 @@
                 <a:ea typeface="Trebuchet MS" pitchFamily="34" charset="-122"/>
                 <a:cs typeface="Trebuchet MS" pitchFamily="34" charset="-120"/>
               </a:rPr>
-              <a:t>t</a:t>
+              <a:t>e</a:t>
             </a:r>
             <a:endParaRPr lang="en-US" sz="900" dirty="0"/>
           </a:p>
@@ -32239,12 +32371,12 @@
         </p:nvSpPr>
         <p:spPr>
           <a:xfrm>
-            <a:off x="5759577" y="4169664"/>
-            <a:ext cx="685800" cy="384048"/>
+            <a:off x="6408638" y="4169664"/>
+            <a:ext cx="685800" cy="475488"/>
           </a:xfrm>
           <a:prstGeom prst="rect">
             <a:avLst>
-              <a:gd name="adj" fmla="val 9524"/>
+              <a:gd name="adj" fmla="val 7692"/>
             </a:avLst>
           </a:prstGeom>
           <a:solidFill>
@@ -32266,8 +32398,8 @@
         </p:nvSpPr>
         <p:spPr>
           <a:xfrm>
-            <a:off x="5759577" y="4169664"/>
-            <a:ext cx="685800" cy="384048"/>
+            <a:off x="6408638" y="4169664"/>
+            <a:ext cx="685800" cy="475488"/>
           </a:xfrm>
           <a:prstGeom prst="rect">
             <a:avLst/>
@@ -32291,7 +32423,7 @@
                 <a:ea typeface="Trebuchet MS" pitchFamily="34" charset="-122"/>
                 <a:cs typeface="Trebuchet MS" pitchFamily="34" charset="-120"/>
               </a:rPr>
-              <a:t>r</a:t>
+              <a:t>c</a:t>
             </a:r>
             <a:endParaRPr lang="en-US" sz="900" dirty="0"/>
           </a:p>
@@ -32305,12 +32437,12 @@
         </p:nvSpPr>
         <p:spPr>
           <a:xfrm>
-            <a:off x="6668262" y="4169664"/>
-            <a:ext cx="685800" cy="384048"/>
+            <a:off x="7447135" y="4169664"/>
+            <a:ext cx="685800" cy="475488"/>
           </a:xfrm>
           <a:prstGeom prst="rect">
             <a:avLst>
-              <a:gd name="adj" fmla="val 9524"/>
+              <a:gd name="adj" fmla="val 7692"/>
             </a:avLst>
           </a:prstGeom>
           <a:solidFill>
@@ -32332,8 +32464,8 @@
         </p:nvSpPr>
         <p:spPr>
           <a:xfrm>
-            <a:off x="6668262" y="4169664"/>
-            <a:ext cx="685800" cy="384048"/>
+            <a:off x="7447135" y="4169664"/>
+            <a:ext cx="685800" cy="475488"/>
           </a:xfrm>
           <a:prstGeom prst="rect">
             <a:avLst/>
@@ -32357,114 +32489,9 @@
                 <a:ea typeface="Trebuchet MS" pitchFamily="34" charset="-122"/>
                 <a:cs typeface="Trebuchet MS" pitchFamily="34" charset="-120"/>
               </a:rPr>
-              <a:t>u</a:t>
+              <a:t>t</a:t>
             </a:r>
             <a:endParaRPr lang="en-US" sz="900" dirty="0"/>
-          </a:p>
-        </p:txBody>
-      </p:sp>
-      <p:sp>
-        <p:nvSpPr>
-          <p:cNvPr id="45" name="Shape 43"/>
-          <p:cNvSpPr/>
-          <p:nvPr/>
-        </p:nvSpPr>
-        <p:spPr>
-          <a:xfrm>
-            <a:off x="7576947" y="4169664"/>
-            <a:ext cx="685800" cy="384048"/>
-          </a:xfrm>
-          <a:prstGeom prst="rect">
-            <a:avLst>
-              <a:gd name="adj" fmla="val 9524"/>
-            </a:avLst>
-          </a:prstGeom>
-          <a:solidFill>
-            <a:srgbClr val="FFFFFF"/>
-          </a:solidFill>
-          <a:ln w="12700">
-            <a:solidFill>
-              <a:srgbClr val="DB2777"/>
-            </a:solidFill>
-            <a:prstDash val="solid"/>
-          </a:ln>
-        </p:spPr>
-      </p:sp>
-      <p:sp>
-        <p:nvSpPr>
-          <p:cNvPr id="46" name="Text 44"/>
-          <p:cNvSpPr/>
-          <p:nvPr/>
-        </p:nvSpPr>
-        <p:spPr>
-          <a:xfrm>
-            <a:off x="7576947" y="4169664"/>
-            <a:ext cx="685800" cy="384048"/>
-          </a:xfrm>
-          <a:prstGeom prst="rect">
-            <a:avLst/>
-          </a:prstGeom>
-          <a:noFill/>
-          <a:ln/>
-        </p:spPr>
-        <p:txBody>
-          <a:bodyPr wrap="square" lIns="0" tIns="0" rIns="0" bIns="0" rtlCol="0" anchor="ctr"/>
-          <a:lstStyle/>
-          <a:p>
-            <a:pPr algn="ctr" indent="0" marL="0">
-              <a:buNone/>
-            </a:pPr>
-            <a:r>
-              <a:rPr lang="en-US" sz="900" b="1" dirty="0">
-                <a:solidFill>
-                  <a:srgbClr val="9D174D"/>
-                </a:solidFill>
-                <a:latin typeface="Trebuchet MS" pitchFamily="34" charset="0"/>
-                <a:ea typeface="Trebuchet MS" pitchFamily="34" charset="-122"/>
-                <a:cs typeface="Trebuchet MS" pitchFamily="34" charset="-120"/>
-              </a:rPr>
-              <a:t>ct</a:t>
-            </a:r>
-            <a:endParaRPr lang="en-US" sz="900" dirty="0"/>
-          </a:p>
-        </p:txBody>
-      </p:sp>
-      <p:sp>
-        <p:nvSpPr>
-          <p:cNvPr id="47" name="Text 45"/>
-          <p:cNvSpPr/>
-          <p:nvPr/>
-        </p:nvSpPr>
-        <p:spPr>
-          <a:xfrm>
-            <a:off x="7576947" y="4572000"/>
-            <a:ext cx="685800" cy="219456"/>
-          </a:xfrm>
-          <a:prstGeom prst="rect">
-            <a:avLst/>
-          </a:prstGeom>
-          <a:noFill/>
-          <a:ln/>
-        </p:spPr>
-        <p:txBody>
-          <a:bodyPr wrap="square" lIns="0" tIns="0" rIns="0" bIns="0" rtlCol="0" anchor="t"/>
-          <a:lstStyle/>
-          <a:p>
-            <a:pPr algn="ctr" indent="0" marL="0">
-              <a:buNone/>
-            </a:pPr>
-            <a:r>
-              <a:rPr lang="en-US" sz="750" i="1" dirty="0">
-                <a:solidFill>
-                  <a:srgbClr val="94A3B8"/>
-                </a:solidFill>
-                <a:latin typeface="Calibri" pitchFamily="34" charset="0"/>
-                <a:ea typeface="Calibri" pitchFamily="34" charset="-122"/>
-                <a:cs typeface="Calibri" pitchFamily="34" charset="-120"/>
-              </a:rPr>
-              <a:t>/kt/</a:t>
-            </a:r>
-            <a:endParaRPr lang="en-US" sz="750" dirty="0"/>
           </a:p>
         </p:txBody>
       </p:sp>
@@ -34594,7 +34621,7 @@
                 <a:ea typeface="Trebuchet MS" pitchFamily="34" charset="-122"/>
                 <a:cs typeface="Trebuchet MS" pitchFamily="34" charset="-120"/>
               </a:rPr>
-              <a:t>struct</a:t>
+              <a:t>tain</a:t>
             </a:r>
             <a:endParaRPr lang="en-US" sz="1300" dirty="0"/>
           </a:p>
@@ -34747,7 +34774,7 @@
                 <a:ea typeface="Trebuchet MS" pitchFamily="34" charset="-122"/>
                 <a:cs typeface="Trebuchet MS" pitchFamily="34" charset="-120"/>
               </a:rPr>
-              <a:t>tain</a:t>
+              <a:t>struct</a:t>
             </a:r>
             <a:endParaRPr lang="en-US" sz="1300" dirty="0"/>
           </a:p>
@@ -34811,7 +34838,7 @@
                 <a:ea typeface="Trebuchet MS" pitchFamily="34" charset="-122"/>
                 <a:cs typeface="Trebuchet MS" pitchFamily="34" charset="-120"/>
               </a:rPr>
-              <a:t>-ent</a:t>
+              <a:t>-tion</a:t>
             </a:r>
             <a:endParaRPr lang="en-US" sz="1300" dirty="0"/>
           </a:p>
@@ -34900,7 +34927,7 @@
                 <a:ea typeface="Trebuchet MS" pitchFamily="34" charset="-122"/>
                 <a:cs typeface="Trebuchet MS" pitchFamily="34" charset="-120"/>
               </a:rPr>
-              <a:t>ey</a:t>
+              <a:t>serve</a:t>
             </a:r>
             <a:endParaRPr lang="en-US" sz="1300" dirty="0"/>
           </a:p>
@@ -35201,7 +35228,7 @@
                 <a:ea typeface="Trebuchet MS" pitchFamily="34" charset="-122"/>
                 <a:cs typeface="Trebuchet MS" pitchFamily="34" charset="-120"/>
               </a:rPr>
-              <a:t>obstruct</a:t>
+              <a:t>obtain</a:t>
             </a:r>
             <a:endParaRPr lang="en-US" sz="1200" dirty="0"/>
           </a:p>
@@ -35267,7 +35294,7 @@
                 <a:ea typeface="Trebuchet MS" pitchFamily="34" charset="-122"/>
                 <a:cs typeface="Trebuchet MS" pitchFamily="34" charset="-120"/>
               </a:rPr>
-              <a:t>obtain</a:t>
+              <a:t>obstruct</a:t>
             </a:r>
             <a:endParaRPr lang="en-US" sz="1200" dirty="0"/>
           </a:p>
@@ -35333,7 +35360,7 @@
                 <a:ea typeface="Trebuchet MS" pitchFamily="34" charset="-122"/>
                 <a:cs typeface="Trebuchet MS" pitchFamily="34" charset="-120"/>
               </a:rPr>
-              <a:t>obey</a:t>
+              <a:t>obvious</a:t>
             </a:r>
             <a:endParaRPr lang="en-US" sz="1200" dirty="0"/>
           </a:p>
@@ -35399,7 +35426,7 @@
                 <a:ea typeface="Trebuchet MS" pitchFamily="34" charset="-122"/>
                 <a:cs typeface="Trebuchet MS" pitchFamily="34" charset="-120"/>
               </a:rPr>
-              <a:t>obvious</a:t>
+              <a:t>obstacle</a:t>
             </a:r>
             <a:endParaRPr lang="en-US" sz="1200" dirty="0"/>
           </a:p>
@@ -35465,7 +35492,7 @@
                 <a:ea typeface="Trebuchet MS" pitchFamily="34" charset="-122"/>
                 <a:cs typeface="Trebuchet MS" pitchFamily="34" charset="-120"/>
               </a:rPr>
-              <a:t>obstacle</a:t>
+              <a:t>obedient</a:t>
             </a:r>
             <a:endParaRPr lang="en-US" sz="1200" dirty="0"/>
           </a:p>
@@ -35531,7 +35558,7 @@
                 <a:ea typeface="Trebuchet MS" pitchFamily="34" charset="-122"/>
                 <a:cs typeface="Trebuchet MS" pitchFamily="34" charset="-120"/>
               </a:rPr>
-              <a:t>obsess</a:t>
+              <a:t>occasion</a:t>
             </a:r>
             <a:endParaRPr lang="en-US" sz="1200" dirty="0"/>
           </a:p>
@@ -36719,7 +36746,7 @@
                 <a:ea typeface="Calibri" pitchFamily="34" charset="-122"/>
                 <a:cs typeface="Calibri" pitchFamily="34" charset="-120"/>
               </a:rPr>
-              <a:t>1.  The prefix 'ob-' comes from Latin.</a:t>
+              <a:t>1.  The prefix 'ob-' always stays spelled exactly as 'ob-' in every word.</a:t>
             </a:r>
             <a:endParaRPr lang="en-US" sz="1300" dirty="0"/>
           </a:p>
@@ -36742,11 +36769,11 @@
             </a:avLst>
           </a:prstGeom>
           <a:solidFill>
-            <a:srgbClr val="DCFCE7"/>
-          </a:solidFill>
-          <a:ln w="12700">
-            <a:solidFill>
-              <a:srgbClr val="16A34A"/>
+            <a:srgbClr val="FEE2E2"/>
+          </a:solidFill>
+          <a:ln w="12700">
+            <a:solidFill>
+              <a:srgbClr val="DC2626"/>
             </a:solidFill>
             <a:prstDash val="solid"/>
           </a:ln>
@@ -36779,13 +36806,13 @@
             <a:r>
               <a:rPr lang="en-US" sz="1100" b="1" dirty="0">
                 <a:solidFill>
-                  <a:srgbClr val="16A34A"/>
+                  <a:srgbClr val="DC2626"/>
                 </a:solidFill>
                 <a:latin typeface="Trebuchet MS" pitchFamily="34" charset="0"/>
                 <a:ea typeface="Trebuchet MS" pitchFamily="34" charset="-122"/>
                 <a:cs typeface="Trebuchet MS" pitchFamily="34" charset="-120"/>
               </a:rPr>
-              <a:t>TRUE</a:t>
+              <a:t>FALSE</a:t>
             </a:r>
             <a:endParaRPr lang="en-US" sz="1100" dirty="0"/>
           </a:p>
@@ -36858,7 +36885,7 @@
                 <a:ea typeface="Calibri" pitchFamily="34" charset="-122"/>
                 <a:cs typeface="Calibri" pitchFamily="34" charset="-120"/>
               </a:rPr>
-              <a:t>2.  The prefix 'ob-' means 'before' or 'earlier'.</a:t>
+              <a:t>2.  The prefix 'ob-' can mean 'against' or 'in the way'.</a:t>
             </a:r>
             <a:endParaRPr lang="en-US" sz="1300" dirty="0"/>
           </a:p>
@@ -36881,11 +36908,11 @@
             </a:avLst>
           </a:prstGeom>
           <a:solidFill>
-            <a:srgbClr val="FEE2E2"/>
-          </a:solidFill>
-          <a:ln w="12700">
-            <a:solidFill>
-              <a:srgbClr val="DC2626"/>
+            <a:srgbClr val="DCFCE7"/>
+          </a:solidFill>
+          <a:ln w="12700">
+            <a:solidFill>
+              <a:srgbClr val="16A34A"/>
             </a:solidFill>
             <a:prstDash val="solid"/>
           </a:ln>
@@ -36918,13 +36945,13 @@
             <a:r>
               <a:rPr lang="en-US" sz="1100" b="1" dirty="0">
                 <a:solidFill>
-                  <a:srgbClr val="DC2626"/>
+                  <a:srgbClr val="16A34A"/>
                 </a:solidFill>
                 <a:latin typeface="Trebuchet MS" pitchFamily="34" charset="0"/>
                 <a:ea typeface="Trebuchet MS" pitchFamily="34" charset="-122"/>
                 <a:cs typeface="Trebuchet MS" pitchFamily="34" charset="-120"/>
               </a:rPr>
-              <a:t>FALSE</a:t>
+              <a:t>TRUE</a:t>
             </a:r>
             <a:endParaRPr lang="en-US" sz="1100" dirty="0"/>
           </a:p>
@@ -36997,7 +37024,7 @@
                 <a:ea typeface="Calibri" pitchFamily="34" charset="-122"/>
                 <a:cs typeface="Calibri" pitchFamily="34" charset="-120"/>
               </a:rPr>
-              <a:t>3.  The word 'obstruct' uses the prefix 'ob-' to mean something is blocking the way.</a:t>
+              <a:t>3.  The word 'obstruct' contains the prefix 'ob-'.</a:t>
             </a:r>
             <a:endParaRPr lang="en-US" sz="1300" dirty="0"/>
           </a:p>
@@ -37136,7 +37163,7 @@
                 <a:ea typeface="Calibri" pitchFamily="34" charset="-122"/>
                 <a:cs typeface="Calibri" pitchFamily="34" charset="-120"/>
               </a:rPr>
-              <a:t>4.  The prefix 'ob-' can mean 'against' or 'in the way'.</a:t>
+              <a:t>4.  The prefix 'ob-' comes from Ancient Greek.</a:t>
             </a:r>
             <a:endParaRPr lang="en-US" sz="1300" dirty="0"/>
           </a:p>
@@ -37159,11 +37186,11 @@
             </a:avLst>
           </a:prstGeom>
           <a:solidFill>
-            <a:srgbClr val="DCFCE7"/>
-          </a:solidFill>
-          <a:ln w="12700">
-            <a:solidFill>
-              <a:srgbClr val="16A34A"/>
+            <a:srgbClr val="FEE2E2"/>
+          </a:solidFill>
+          <a:ln w="12700">
+            <a:solidFill>
+              <a:srgbClr val="DC2626"/>
             </a:solidFill>
             <a:prstDash val="solid"/>
           </a:ln>
@@ -37196,13 +37223,13 @@
             <a:r>
               <a:rPr lang="en-US" sz="1100" b="1" dirty="0">
                 <a:solidFill>
-                  <a:srgbClr val="16A34A"/>
+                  <a:srgbClr val="DC2626"/>
                 </a:solidFill>
                 <a:latin typeface="Trebuchet MS" pitchFamily="34" charset="0"/>
                 <a:ea typeface="Trebuchet MS" pitchFamily="34" charset="-122"/>
                 <a:cs typeface="Trebuchet MS" pitchFamily="34" charset="-120"/>
               </a:rPr>
-              <a:t>TRUE</a:t>
+              <a:t>FALSE</a:t>
             </a:r>
             <a:endParaRPr lang="en-US" sz="1100" dirty="0"/>
           </a:p>
@@ -37275,7 +37302,7 @@
                 <a:ea typeface="Calibri" pitchFamily="34" charset="-122"/>
                 <a:cs typeface="Calibri" pitchFamily="34" charset="-120"/>
               </a:rPr>
-              <a:t>5.  The word 'obtain' means to throw something away.</a:t>
+              <a:t>5.  The word 'observe' starts with the prefix 'ob-'.</a:t>
             </a:r>
             <a:endParaRPr lang="en-US" sz="1300" dirty="0"/>
           </a:p>
@@ -37298,11 +37325,11 @@
             </a:avLst>
           </a:prstGeom>
           <a:solidFill>
-            <a:srgbClr val="FEE2E2"/>
-          </a:solidFill>
-          <a:ln w="12700">
-            <a:solidFill>
-              <a:srgbClr val="DC2626"/>
+            <a:srgbClr val="DCFCE7"/>
+          </a:solidFill>
+          <a:ln w="12700">
+            <a:solidFill>
+              <a:srgbClr val="16A34A"/>
             </a:solidFill>
             <a:prstDash val="solid"/>
           </a:ln>
@@ -37335,13 +37362,13 @@
             <a:r>
               <a:rPr lang="en-US" sz="1100" b="1" dirty="0">
                 <a:solidFill>
-                  <a:srgbClr val="DC2626"/>
+                  <a:srgbClr val="16A34A"/>
                 </a:solidFill>
                 <a:latin typeface="Trebuchet MS" pitchFamily="34" charset="0"/>
                 <a:ea typeface="Trebuchet MS" pitchFamily="34" charset="-122"/>
                 <a:cs typeface="Trebuchet MS" pitchFamily="34" charset="-120"/>
               </a:rPr>
-              <a:t>FALSE</a:t>
+              <a:t>TRUE</a:t>
             </a:r>
             <a:endParaRPr lang="en-US" sz="1100" dirty="0"/>
           </a:p>
@@ -38046,7 +38073,7 @@
                 <a:ea typeface="Trebuchet MS" pitchFamily="34" charset="-122"/>
                 <a:cs typeface="Trebuchet MS" pitchFamily="34" charset="-120"/>
               </a:rPr>
-              <a:t>obstruct</a:t>
+              <a:t>obtain</a:t>
             </a:r>
             <a:endParaRPr lang="en-US" sz="1300" dirty="0"/>
           </a:p>
@@ -38112,7 +38139,7 @@
                 <a:ea typeface="Trebuchet MS" pitchFamily="34" charset="-122"/>
                 <a:cs typeface="Trebuchet MS" pitchFamily="34" charset="-120"/>
               </a:rPr>
-              <a:t>obtain</a:t>
+              <a:t>obstruct</a:t>
             </a:r>
             <a:endParaRPr lang="en-US" sz="1300" dirty="0"/>
           </a:p>
@@ -38178,7 +38205,7 @@
                 <a:ea typeface="Trebuchet MS" pitchFamily="34" charset="-122"/>
                 <a:cs typeface="Trebuchet MS" pitchFamily="34" charset="-120"/>
               </a:rPr>
-              <a:t>obey</a:t>
+              <a:t>obvious</a:t>
             </a:r>
             <a:endParaRPr lang="en-US" sz="1300" dirty="0"/>
           </a:p>
@@ -38244,7 +38271,7 @@
                 <a:ea typeface="Trebuchet MS" pitchFamily="34" charset="-122"/>
                 <a:cs typeface="Trebuchet MS" pitchFamily="34" charset="-120"/>
               </a:rPr>
-              <a:t>obvious</a:t>
+              <a:t>obstacle</a:t>
             </a:r>
             <a:endParaRPr lang="en-US" sz="1300" dirty="0"/>
           </a:p>
@@ -38310,7 +38337,7 @@
                 <a:ea typeface="Trebuchet MS" pitchFamily="34" charset="-122"/>
                 <a:cs typeface="Trebuchet MS" pitchFamily="34" charset="-120"/>
               </a:rPr>
-              <a:t>obstacle</a:t>
+              <a:t>obedient</a:t>
             </a:r>
             <a:endParaRPr lang="en-US" sz="1300" dirty="0"/>
           </a:p>
@@ -39273,7 +39300,7 @@
                 <a:ea typeface="Trebuchet MS" pitchFamily="34" charset="-122"/>
                 <a:cs typeface="Trebuchet MS" pitchFamily="34" charset="-120"/>
               </a:rPr>
-              <a:t>struct</a:t>
+              <a:t>tain</a:t>
             </a:r>
             <a:endParaRPr lang="en-US" sz="1300" dirty="0"/>
           </a:p>
@@ -39426,7 +39453,7 @@
                 <a:ea typeface="Trebuchet MS" pitchFamily="34" charset="-122"/>
                 <a:cs typeface="Trebuchet MS" pitchFamily="34" charset="-120"/>
               </a:rPr>
-              <a:t>tain</a:t>
+              <a:t>struct</a:t>
             </a:r>
             <a:endParaRPr lang="en-US" sz="1300" dirty="0"/>
           </a:p>
@@ -39490,7 +39517,7 @@
                 <a:ea typeface="Trebuchet MS" pitchFamily="34" charset="-122"/>
                 <a:cs typeface="Trebuchet MS" pitchFamily="34" charset="-120"/>
               </a:rPr>
-              <a:t>-ent</a:t>
+              <a:t>-tion</a:t>
             </a:r>
             <a:endParaRPr lang="en-US" sz="1300" dirty="0"/>
           </a:p>
@@ -39579,7 +39606,7 @@
                 <a:ea typeface="Trebuchet MS" pitchFamily="34" charset="-122"/>
                 <a:cs typeface="Trebuchet MS" pitchFamily="34" charset="-120"/>
               </a:rPr>
-              <a:t>ey</a:t>
+              <a:t>serve</a:t>
             </a:r>
             <a:endParaRPr lang="en-US" sz="1300" dirty="0"/>
           </a:p>
@@ -40554,7 +40581,7 @@
                 <a:ea typeface="Calibri" pitchFamily="34" charset="-122"/>
                 <a:cs typeface="Calibri" pitchFamily="34" charset="-120"/>
               </a:rPr>
-              <a:t>Something that is in the way and makes it hard to get past.</a:t>
+              <a:t>Doing what you are told; following rules or instructions willingly.</a:t>
             </a:r>
             <a:endParaRPr lang="en-US" sz="1200" dirty="0"/>
           </a:p>
@@ -40693,7 +40720,7 @@
                 <a:ea typeface="Calibri" pitchFamily="34" charset="-122"/>
                 <a:cs typeface="Calibri" pitchFamily="34" charset="-120"/>
               </a:rPr>
-              <a:t>To get or find something that you need or want.</a:t>
+              <a:t>To block a path or stop something from moving through.</a:t>
             </a:r>
             <a:endParaRPr lang="en-US" sz="1200" dirty="0"/>
           </a:p>
@@ -40766,7 +40793,7 @@
                 <a:ea typeface="Trebuchet MS" pitchFamily="34" charset="-122"/>
                 <a:cs typeface="Trebuchet MS" pitchFamily="34" charset="-120"/>
               </a:rPr>
-              <a:t>obstruct</a:t>
+              <a:t>obtain</a:t>
             </a:r>
             <a:endParaRPr lang="en-US" sz="1200" dirty="0"/>
           </a:p>
@@ -40832,7 +40859,7 @@
                 <a:ea typeface="Calibri" pitchFamily="34" charset="-122"/>
                 <a:cs typeface="Calibri" pitchFamily="34" charset="-120"/>
               </a:rPr>
-              <a:t>Something that is very easy to see or understand.</a:t>
+              <a:t>Something that is in the way and makes it hard to get past.</a:t>
             </a:r>
             <a:endParaRPr lang="en-US" sz="1200" dirty="0"/>
           </a:p>
@@ -40905,7 +40932,7 @@
                 <a:ea typeface="Trebuchet MS" pitchFamily="34" charset="-122"/>
                 <a:cs typeface="Trebuchet MS" pitchFamily="34" charset="-120"/>
               </a:rPr>
-              <a:t>obtain</a:t>
+              <a:t>obstruct</a:t>
             </a:r>
             <a:endParaRPr lang="en-US" sz="1200" dirty="0"/>
           </a:p>
@@ -41044,7 +41071,7 @@
                 <a:ea typeface="Trebuchet MS" pitchFamily="34" charset="-122"/>
                 <a:cs typeface="Trebuchet MS" pitchFamily="34" charset="-120"/>
               </a:rPr>
-              <a:t>obey</a:t>
+              <a:t>obvious</a:t>
             </a:r>
             <a:endParaRPr lang="en-US" sz="1200" dirty="0"/>
           </a:p>
@@ -41110,7 +41137,7 @@
                 <a:ea typeface="Calibri" pitchFamily="34" charset="-122"/>
                 <a:cs typeface="Calibri" pitchFamily="34" charset="-120"/>
               </a:rPr>
-              <a:t>To follow the rules or do what someone tells you to do.</a:t>
+              <a:t>Easy to see or understand; very clear and plain.</a:t>
             </a:r>
             <a:endParaRPr lang="en-US" sz="1200" dirty="0"/>
           </a:p>
@@ -41183,7 +41210,7 @@
                 <a:ea typeface="Trebuchet MS" pitchFamily="34" charset="-122"/>
                 <a:cs typeface="Trebuchet MS" pitchFamily="34" charset="-120"/>
               </a:rPr>
-              <a:t>obvious</a:t>
+              <a:t>obstacle</a:t>
             </a:r>
             <a:endParaRPr lang="en-US" sz="1200" dirty="0"/>
           </a:p>
@@ -41249,7 +41276,7 @@
                 <a:ea typeface="Calibri" pitchFamily="34" charset="-122"/>
                 <a:cs typeface="Calibri" pitchFamily="34" charset="-120"/>
               </a:rPr>
-              <a:t>To block a path or stop something from moving through.</a:t>
+              <a:t>To get or receive something that you wanted or needed.</a:t>
             </a:r>
             <a:endParaRPr lang="en-US" sz="1200" dirty="0"/>
           </a:p>
@@ -41322,7 +41349,7 @@
                 <a:ea typeface="Trebuchet MS" pitchFamily="34" charset="-122"/>
                 <a:cs typeface="Trebuchet MS" pitchFamily="34" charset="-120"/>
               </a:rPr>
-              <a:t>obstacle</a:t>
+              <a:t>obedient</a:t>
             </a:r>
             <a:endParaRPr lang="en-US" sz="1200" dirty="0"/>
           </a:p>
@@ -41388,7 +41415,7 @@
                 <a:ea typeface="Calibri" pitchFamily="34" charset="-122"/>
                 <a:cs typeface="Calibri" pitchFamily="34" charset="-120"/>
               </a:rPr>
-              <a:t>To say that you disagree with something or are against it.</a:t>
+              <a:t>To say you disagree with something or are against it.</a:t>
             </a:r>
             <a:endParaRPr lang="en-US" sz="1200" dirty="0"/>
           </a:p>
@@ -41883,7 +41910,7 @@
                 <a:ea typeface="Calibri" pitchFamily="34" charset="-122"/>
                 <a:cs typeface="Calibri" pitchFamily="34" charset="-120"/>
               </a:rPr>
-              <a:t>The students had to observe the tadpoles carefully in science class.</a:t>
+              <a:t>The scientist used a telescope to observe the stars in the night sky.</a:t>
             </a:r>
             <a:endParaRPr lang="en-US" sz="1500" dirty="0"/>
           </a:p>
@@ -42047,7 +42074,7 @@
                 <a:ea typeface="Calibri" pitchFamily="34" charset="-122"/>
                 <a:cs typeface="Calibri" pitchFamily="34" charset="-120"/>
               </a:rPr>
-              <a:t>A fallen tree was starting to obstruct the path through the bush.</a:t>
+              <a:t>A large fallen tree was an obstacle on the path through the bush.</a:t>
             </a:r>
             <a:endParaRPr lang="en-US" sz="1500" dirty="0"/>
           </a:p>
@@ -42211,7 +42238,7 @@
                 <a:ea typeface="Calibri" pitchFamily="34" charset="-122"/>
                 <a:cs typeface="Calibri" pitchFamily="34" charset="-120"/>
               </a:rPr>
-              <a:t>It was obvious that the puppy had chewed through the garden hose.</a:t>
+              <a:t>She tried to obtain a library card so she could borrow more books.</a:t>
             </a:r>
             <a:endParaRPr lang="en-US" sz="1500" dirty="0"/>
           </a:p>
